--- a/Web Development Course/L23-arrays_and_objects/L23_arrays_and_objects.pptx
+++ b/Web Development Course/L23-arrays_and_objects/L23_arrays_and_objects.pptx
@@ -309,7 +309,7 @@
           <a:p>
             <a:fld id="{4AAD347D-5ACD-4C99-B74B-A9C85AD731AF}" type="datetimeFigureOut">
               <a:rPr lang="en-US" dirty="0"/>
-              <a:t>1/9/2026</a:t>
+              <a:t>1/15/2026</a:t>
             </a:fld>
             <a:endParaRPr lang="en-US" dirty="0"/>
           </a:p>
@@ -587,7 +587,7 @@
           <a:p>
             <a:fld id="{4509A250-FF31-4206-8172-F9D3106AACB1}" type="datetimeFigureOut">
               <a:rPr lang="en-US" dirty="0"/>
-              <a:t>1/9/2026</a:t>
+              <a:t>1/15/2026</a:t>
             </a:fld>
             <a:endParaRPr lang="en-US" dirty="0"/>
           </a:p>
@@ -784,7 +784,7 @@
           <a:p>
             <a:fld id="{4509A250-FF31-4206-8172-F9D3106AACB1}" type="datetimeFigureOut">
               <a:rPr lang="en-US" dirty="0"/>
-              <a:t>1/9/2026</a:t>
+              <a:t>1/15/2026</a:t>
             </a:fld>
             <a:endParaRPr lang="en-US" dirty="0"/>
           </a:p>
@@ -1055,7 +1055,7 @@
           <a:p>
             <a:fld id="{4509A250-FF31-4206-8172-F9D3106AACB1}" type="datetimeFigureOut">
               <a:rPr lang="en-US" dirty="0"/>
-              <a:t>1/9/2026</a:t>
+              <a:t>1/15/2026</a:t>
             </a:fld>
             <a:endParaRPr lang="en-US" dirty="0"/>
           </a:p>
@@ -1390,7 +1390,7 @@
           <a:p>
             <a:fld id="{4509A250-FF31-4206-8172-F9D3106AACB1}" type="datetimeFigureOut">
               <a:rPr lang="en-US" dirty="0"/>
-              <a:t>1/9/2026</a:t>
+              <a:t>1/15/2026</a:t>
             </a:fld>
             <a:endParaRPr lang="en-US" dirty="0"/>
           </a:p>
@@ -2003,7 +2003,7 @@
           <a:p>
             <a:fld id="{4509A250-FF31-4206-8172-F9D3106AACB1}" type="datetimeFigureOut">
               <a:rPr lang="en-US" dirty="0"/>
-              <a:t>1/9/2026</a:t>
+              <a:t>1/15/2026</a:t>
             </a:fld>
             <a:endParaRPr lang="en-US" dirty="0"/>
           </a:p>
@@ -2853,7 +2853,7 @@
           <a:p>
             <a:fld id="{4509A250-FF31-4206-8172-F9D3106AACB1}" type="datetimeFigureOut">
               <a:rPr lang="en-US" dirty="0"/>
-              <a:t>1/9/2026</a:t>
+              <a:t>1/15/2026</a:t>
             </a:fld>
             <a:endParaRPr lang="en-US" dirty="0"/>
           </a:p>
@@ -3026,7 +3026,7 @@
           <a:p>
             <a:fld id="{4509A250-FF31-4206-8172-F9D3106AACB1}" type="datetimeFigureOut">
               <a:rPr lang="en-US" dirty="0"/>
-              <a:t>1/9/2026</a:t>
+              <a:t>1/15/2026</a:t>
             </a:fld>
             <a:endParaRPr lang="en-US" dirty="0"/>
           </a:p>
@@ -3209,7 +3209,7 @@
           <a:p>
             <a:fld id="{4509A250-FF31-4206-8172-F9D3106AACB1}" type="datetimeFigureOut">
               <a:rPr lang="en-US" dirty="0"/>
-              <a:t>1/9/2026</a:t>
+              <a:t>1/15/2026</a:t>
             </a:fld>
             <a:endParaRPr lang="en-US" dirty="0"/>
           </a:p>
@@ -3382,7 +3382,7 @@
           <a:p>
             <a:fld id="{4509A250-FF31-4206-8172-F9D3106AACB1}" type="datetimeFigureOut">
               <a:rPr lang="en-US" dirty="0"/>
-              <a:t>1/9/2026</a:t>
+              <a:t>1/15/2026</a:t>
             </a:fld>
             <a:endParaRPr lang="en-US" dirty="0"/>
           </a:p>
@@ -3629,7 +3629,7 @@
           <a:p>
             <a:fld id="{4509A250-FF31-4206-8172-F9D3106AACB1}" type="datetimeFigureOut">
               <a:rPr lang="en-US" dirty="0"/>
-              <a:t>1/9/2026</a:t>
+              <a:t>1/15/2026</a:t>
             </a:fld>
             <a:endParaRPr lang="en-US" dirty="0"/>
           </a:p>
@@ -3924,7 +3924,7 @@
           <a:p>
             <a:fld id="{4509A250-FF31-4206-8172-F9D3106AACB1}" type="datetimeFigureOut">
               <a:rPr lang="en-US" dirty="0"/>
-              <a:t>1/9/2026</a:t>
+              <a:t>1/15/2026</a:t>
             </a:fld>
             <a:endParaRPr lang="en-US" dirty="0"/>
           </a:p>
@@ -4365,7 +4365,7 @@
           <a:p>
             <a:fld id="{4509A250-FF31-4206-8172-F9D3106AACB1}" type="datetimeFigureOut">
               <a:rPr lang="en-US" dirty="0"/>
-              <a:t>1/9/2026</a:t>
+              <a:t>1/15/2026</a:t>
             </a:fld>
             <a:endParaRPr lang="en-US" dirty="0"/>
           </a:p>
@@ -4486,7 +4486,7 @@
           <a:p>
             <a:fld id="{4509A250-FF31-4206-8172-F9D3106AACB1}" type="datetimeFigureOut">
               <a:rPr lang="en-US" dirty="0"/>
-              <a:t>1/9/2026</a:t>
+              <a:t>1/15/2026</a:t>
             </a:fld>
             <a:endParaRPr lang="en-US" dirty="0"/>
           </a:p>
@@ -4584,7 +4584,7 @@
           <a:p>
             <a:fld id="{4509A250-FF31-4206-8172-F9D3106AACB1}" type="datetimeFigureOut">
               <a:rPr lang="en-US" dirty="0"/>
-              <a:t>1/9/2026</a:t>
+              <a:t>1/15/2026</a:t>
             </a:fld>
             <a:endParaRPr lang="en-US" dirty="0"/>
           </a:p>
@@ -4866,7 +4866,7 @@
           <a:p>
             <a:fld id="{4509A250-FF31-4206-8172-F9D3106AACB1}" type="datetimeFigureOut">
               <a:rPr lang="en-US" dirty="0"/>
-              <a:t>1/9/2026</a:t>
+              <a:t>1/15/2026</a:t>
             </a:fld>
             <a:endParaRPr lang="en-US" dirty="0"/>
           </a:p>
@@ -5144,7 +5144,7 @@
           <a:p>
             <a:fld id="{4509A250-FF31-4206-8172-F9D3106AACB1}" type="datetimeFigureOut">
               <a:rPr lang="en-US" dirty="0"/>
-              <a:t>1/9/2026</a:t>
+              <a:t>1/15/2026</a:t>
             </a:fld>
             <a:endParaRPr lang="en-US" dirty="0"/>
           </a:p>
@@ -5576,7 +5576,7 @@
           <a:p>
             <a:fld id="{4509A250-FF31-4206-8172-F9D3106AACB1}" type="datetimeFigureOut">
               <a:rPr lang="en-US" dirty="0"/>
-              <a:t>1/9/2026</a:t>
+              <a:t>1/15/2026</a:t>
             </a:fld>
             <a:endParaRPr lang="en-US" dirty="0"/>
           </a:p>
@@ -6179,7 +6179,6 @@
               <a:rPr lang="en-US" b="1" dirty="0"/>
               <a:t>Working with Real Data</a:t>
             </a:r>
-            <a:endParaRPr lang="en-US" b="1" dirty="0"/>
           </a:p>
         </p:txBody>
       </p:sp>
@@ -7652,11 +7651,7 @@
           <a:p>
             <a:r>
               <a:rPr lang="en-US" b="1" dirty="0" smtClean="0"/>
-              <a:t>class </a:t>
-            </a:r>
-            <a:r>
-              <a:rPr lang="en-US" b="1" dirty="0" smtClean="0"/>
-              <a:t>of JS (Java script)</a:t>
+              <a:t>class of JS (Java script)</a:t>
             </a:r>
             <a:endParaRPr lang="en-US" b="1" dirty="0"/>
           </a:p>
@@ -7902,11 +7897,7 @@
           <a:p>
             <a:r>
               <a:rPr lang="en-US" b="1" dirty="0" smtClean="0"/>
-              <a:t>Topic : </a:t>
-            </a:r>
-            <a:r>
-              <a:rPr lang="en-US" b="1" dirty="0" smtClean="0"/>
-              <a:t>Arrays &amp; Objects</a:t>
+              <a:t>Topic : Arrays &amp; Objects</a:t>
             </a:r>
             <a:endParaRPr lang="en-US" b="1" dirty="0"/>
           </a:p>
@@ -8453,7 +8444,6 @@
               <a:rPr lang="en-US" sz="4000" b="1" dirty="0"/>
               <a:t>Introduction to Arrays &amp; Objects</a:t>
             </a:r>
-            <a:endParaRPr lang="en-US" sz="4000" b="1" dirty="0"/>
           </a:p>
         </p:txBody>
       </p:sp>
@@ -8693,7 +8683,6 @@
               <a:rPr lang="en-US" sz="4000" b="1" dirty="0"/>
               <a:t>Fundamentals</a:t>
             </a:r>
-            <a:endParaRPr lang="en-US" sz="4000" b="1" dirty="0"/>
           </a:p>
         </p:txBody>
       </p:sp>
@@ -8929,7 +8918,6 @@
               <a:rPr lang="en-US" sz="3600" b="1" dirty="0"/>
               <a:t>Common Array Methods – push &amp; pop</a:t>
             </a:r>
-            <a:endParaRPr lang="en-US" sz="3600" b="1" dirty="0"/>
           </a:p>
         </p:txBody>
       </p:sp>
@@ -9481,8 +9469,8 @@
         </p:nvSpPr>
         <p:spPr bwMode="auto">
           <a:xfrm>
-            <a:off x="1194264" y="2672668"/>
-            <a:ext cx="9265755" cy="2693045"/>
+            <a:off x="1194264" y="2608548"/>
+            <a:ext cx="9265755" cy="2821285"/>
           </a:xfrm>
           <a:prstGeom prst="rect">
             <a:avLst/>
@@ -9589,7 +9577,7 @@
             </a:r>
             <a:r>
               <a:rPr lang="en-US" sz="2400" dirty="0" smtClean="0"/>
-              <a:t>objects</a:t>
+              <a:t>objects or a function</a:t>
             </a:r>
           </a:p>
           <a:p>
@@ -9606,14 +9594,28 @@
             </a:r>
             <a:r>
               <a:rPr lang="en-US" sz="2400" dirty="0"/>
-              <a:t>represent real-world entities in code</a:t>
-            </a:r>
-            <a:br>
+              <a:t>represent real-world entities in </a:t>
+            </a:r>
+            <a:r>
+              <a:rPr lang="en-US" sz="2400" dirty="0" smtClean="0"/>
+              <a:t>code</a:t>
+            </a:r>
+          </a:p>
+          <a:p>
+            <a:pPr marL="342900" indent="-342900">
+              <a:buClr>
+                <a:schemeClr val="tx1"/>
+              </a:buClr>
+              <a:buFont typeface="Wingdings" panose="05000000000000000000" pitchFamily="2" charset="2"/>
+              <a:buChar char="q"/>
+            </a:pPr>
+            <a:r>
+              <a:rPr lang="en-US" sz="2400" dirty="0" smtClean="0"/>
+              <a:t>They </a:t>
+            </a:r>
+            <a:r>
               <a:rPr lang="en-US" sz="2400" dirty="0"/>
-            </a:br>
-            <a:r>
-              <a:rPr lang="en-US" sz="2400" dirty="0"/>
-              <a:t>They are heavily used in APIs and application state</a:t>
+              <a:t>are heavily used in APIs and application state</a:t>
             </a:r>
           </a:p>
         </p:txBody>
@@ -9691,7 +9693,6 @@
               <a:rPr lang="en-US" b="1" dirty="0"/>
               <a:t>Object Data</a:t>
             </a:r>
-            <a:endParaRPr lang="en-US" b="1" dirty="0"/>
           </a:p>
         </p:txBody>
       </p:sp>
